--- a/lectures/07.adapter/adapter.pptx
+++ b/lectures/07.adapter/adapter.pptx
@@ -312,7 +312,7 @@
           <a:p>
             <a:fld id="{2F3DCB6D-0B48-4A3D-B663-06C3F903A9D3}" type="datetimeFigureOut">
               <a:rPr lang="ru-RU" smtClean="0"/>
-              <a:t>30.10.2025</a:t>
+              <a:t>22.10.2026</a:t>
             </a:fld>
             <a:endParaRPr lang="ru-RU"/>
           </a:p>
@@ -5624,7 +5624,7 @@
           <a:p>
             <a:fld id="{2590F9C9-AB92-4E86-B698-DEC9BF4350FF}" type="datetimeFigureOut">
               <a:rPr lang="ru-RU" smtClean="0"/>
-              <a:t>30.10.2025</a:t>
+              <a:t>22.10.2026</a:t>
             </a:fld>
             <a:endParaRPr lang="ru-RU"/>
           </a:p>
@@ -5822,7 +5822,7 @@
           <a:p>
             <a:fld id="{2590F9C9-AB92-4E86-B698-DEC9BF4350FF}" type="datetimeFigureOut">
               <a:rPr lang="ru-RU" smtClean="0"/>
-              <a:t>30.10.2025</a:t>
+              <a:t>22.10.2026</a:t>
             </a:fld>
             <a:endParaRPr lang="ru-RU"/>
           </a:p>
@@ -6030,7 +6030,7 @@
           <a:p>
             <a:fld id="{2590F9C9-AB92-4E86-B698-DEC9BF4350FF}" type="datetimeFigureOut">
               <a:rPr lang="ru-RU" smtClean="0"/>
-              <a:t>30.10.2025</a:t>
+              <a:t>22.10.2026</a:t>
             </a:fld>
             <a:endParaRPr lang="ru-RU"/>
           </a:p>
@@ -6228,7 +6228,7 @@
           <a:p>
             <a:fld id="{2590F9C9-AB92-4E86-B698-DEC9BF4350FF}" type="datetimeFigureOut">
               <a:rPr lang="ru-RU" smtClean="0"/>
-              <a:t>30.10.2025</a:t>
+              <a:t>22.10.2026</a:t>
             </a:fld>
             <a:endParaRPr lang="ru-RU"/>
           </a:p>
@@ -6503,7 +6503,7 @@
           <a:p>
             <a:fld id="{2590F9C9-AB92-4E86-B698-DEC9BF4350FF}" type="datetimeFigureOut">
               <a:rPr lang="ru-RU" smtClean="0"/>
-              <a:t>30.10.2025</a:t>
+              <a:t>22.10.2026</a:t>
             </a:fld>
             <a:endParaRPr lang="ru-RU"/>
           </a:p>
@@ -6768,7 +6768,7 @@
           <a:p>
             <a:fld id="{2590F9C9-AB92-4E86-B698-DEC9BF4350FF}" type="datetimeFigureOut">
               <a:rPr lang="ru-RU" smtClean="0"/>
-              <a:t>30.10.2025</a:t>
+              <a:t>22.10.2026</a:t>
             </a:fld>
             <a:endParaRPr lang="ru-RU"/>
           </a:p>
@@ -7180,7 +7180,7 @@
           <a:p>
             <a:fld id="{2590F9C9-AB92-4E86-B698-DEC9BF4350FF}" type="datetimeFigureOut">
               <a:rPr lang="ru-RU" smtClean="0"/>
-              <a:t>30.10.2025</a:t>
+              <a:t>22.10.2026</a:t>
             </a:fld>
             <a:endParaRPr lang="ru-RU"/>
           </a:p>
@@ -7321,7 +7321,7 @@
           <a:p>
             <a:fld id="{2590F9C9-AB92-4E86-B698-DEC9BF4350FF}" type="datetimeFigureOut">
               <a:rPr lang="ru-RU" smtClean="0"/>
-              <a:t>30.10.2025</a:t>
+              <a:t>22.10.2026</a:t>
             </a:fld>
             <a:endParaRPr lang="ru-RU"/>
           </a:p>
@@ -7434,7 +7434,7 @@
           <a:p>
             <a:fld id="{2590F9C9-AB92-4E86-B698-DEC9BF4350FF}" type="datetimeFigureOut">
               <a:rPr lang="ru-RU" smtClean="0"/>
-              <a:t>30.10.2025</a:t>
+              <a:t>22.10.2026</a:t>
             </a:fld>
             <a:endParaRPr lang="ru-RU"/>
           </a:p>
@@ -7745,7 +7745,7 @@
           <a:p>
             <a:fld id="{2590F9C9-AB92-4E86-B698-DEC9BF4350FF}" type="datetimeFigureOut">
               <a:rPr lang="ru-RU" smtClean="0"/>
-              <a:t>30.10.2025</a:t>
+              <a:t>22.10.2026</a:t>
             </a:fld>
             <a:endParaRPr lang="ru-RU"/>
           </a:p>
@@ -8033,7 +8033,7 @@
           <a:p>
             <a:fld id="{2590F9C9-AB92-4E86-B698-DEC9BF4350FF}" type="datetimeFigureOut">
               <a:rPr lang="ru-RU" smtClean="0"/>
-              <a:t>30.10.2025</a:t>
+              <a:t>22.10.2026</a:t>
             </a:fld>
             <a:endParaRPr lang="ru-RU"/>
           </a:p>
@@ -8274,7 +8274,7 @@
           <a:p>
             <a:fld id="{2590F9C9-AB92-4E86-B698-DEC9BF4350FF}" type="datetimeFigureOut">
               <a:rPr lang="ru-RU" smtClean="0"/>
-              <a:t>30.10.2025</a:t>
+              <a:t>22.10.2026</a:t>
             </a:fld>
             <a:endParaRPr lang="ru-RU"/>
           </a:p>
@@ -11556,53 +11556,6 @@
           </a:p>
         </p:txBody>
       </p:sp>
-      <p:pic>
-        <p:nvPicPr>
-          <p:cNvPr id="1026" name="Picture 2">
-            <a:extLst>
-              <a:ext uri="{FF2B5EF4-FFF2-40B4-BE49-F238E27FC236}">
-                <a16:creationId xmlns:a16="http://schemas.microsoft.com/office/drawing/2014/main" id="{D94AD815-6F7C-3FD1-18DD-D0FF32B07421}"/>
-              </a:ext>
-            </a:extLst>
-          </p:cNvPr>
-          <p:cNvPicPr>
-            <a:picLocks noGrp="1" noChangeAspect="1" noChangeArrowheads="1"/>
-          </p:cNvPicPr>
-          <p:nvPr>
-            <p:ph idx="1"/>
-          </p:nvPr>
-        </p:nvPicPr>
-        <p:blipFill>
-          <a:blip r:embed="rId3" cstate="print">
-            <a:extLst>
-              <a:ext uri="{28A0092B-C50C-407E-A947-70E740481C1C}">
-                <a14:useLocalDpi xmlns:a14="http://schemas.microsoft.com/office/drawing/2010/main" val="0"/>
-              </a:ext>
-            </a:extLst>
-          </a:blip>
-          <a:srcRect/>
-          <a:stretch/>
-        </p:blipFill>
-        <p:spPr bwMode="auto">
-          <a:xfrm>
-            <a:off x="1453384" y="1825625"/>
-            <a:ext cx="9285232" cy="4351338"/>
-          </a:xfrm>
-          <a:prstGeom prst="rect">
-            <a:avLst/>
-          </a:prstGeom>
-          <a:noFill/>
-          <a:extLst>
-            <a:ext uri="{909E8E84-426E-40DD-AFC4-6F175D3DCCD1}">
-              <a14:hiddenFill xmlns:a14="http://schemas.microsoft.com/office/drawing/2010/main">
-                <a:solidFill>
-                  <a:srgbClr val="FFFFFF"/>
-                </a:solidFill>
-              </a14:hiddenFill>
-            </a:ext>
-          </a:extLst>
-        </p:spPr>
-      </p:pic>
       <p:sp>
         <p:nvSpPr>
           <p:cNvPr id="4" name="TextBox 3">
@@ -11638,6 +11591,38 @@
           </a:p>
         </p:txBody>
       </p:sp>
+      <p:pic>
+        <p:nvPicPr>
+          <p:cNvPr id="5" name="Content Placeholder 4">
+            <a:extLst>
+              <a:ext uri="{FF2B5EF4-FFF2-40B4-BE49-F238E27FC236}">
+                <a16:creationId xmlns:a16="http://schemas.microsoft.com/office/drawing/2014/main" id="{D8A62CA5-3044-45EA-8BD5-AAFFDACD4AE8}"/>
+              </a:ext>
+            </a:extLst>
+          </p:cNvPr>
+          <p:cNvPicPr>
+            <a:picLocks noGrp="1" noChangeAspect="1"/>
+          </p:cNvPicPr>
+          <p:nvPr>
+            <p:ph idx="1"/>
+          </p:nvPr>
+        </p:nvPicPr>
+        <p:blipFill>
+          <a:blip r:embed="rId3"/>
+          <a:stretch>
+            <a:fillRect/>
+          </a:stretch>
+        </p:blipFill>
+        <p:spPr>
+          <a:xfrm>
+            <a:off x="838200" y="2158994"/>
+            <a:ext cx="10515600" cy="3684600"/>
+          </a:xfrm>
+          <a:prstGeom prst="rect">
+            <a:avLst/>
+          </a:prstGeom>
+        </p:spPr>
+      </p:pic>
     </p:spTree>
     <p:extLst>
       <p:ext uri="{BB962C8B-B14F-4D97-AF65-F5344CB8AC3E}">
@@ -11934,14 +11919,12 @@
             </a:extLst>
           </a:blip>
           <a:srcRect/>
-          <a:stretch>
-            <a:fillRect/>
-          </a:stretch>
+          <a:stretch/>
         </p:blipFill>
         <p:spPr bwMode="auto">
           <a:xfrm>
-            <a:off x="1012135" y="1632857"/>
-            <a:ext cx="10167732" cy="3592286"/>
+            <a:off x="1012135" y="1674598"/>
+            <a:ext cx="10167732" cy="3508803"/>
           </a:xfrm>
           <a:prstGeom prst="rect">
             <a:avLst/>
